--- a/Universal Dialog Editor/UDSPP.pptx
+++ b/Universal Dialog Editor/UDSPP.pptx
@@ -205,7 +205,7 @@
           <a:p>
             <a:fld id="{EAB58A00-1403-4446-B5A1-5C27B77DBBC4}" type="datetimeFigureOut">
               <a:rPr lang="de-DE" smtClean="0"/>
-              <a:t>31.08.2021</a:t>
+              <a:t>01.09.2021</a:t>
             </a:fld>
             <a:endParaRPr lang="de-DE"/>
           </a:p>
@@ -792,7 +792,7 @@
           <a:p>
             <a:fld id="{0767F863-66EA-4676-96BD-1A330B9619CB}" type="datetimeFigureOut">
               <a:rPr lang="de-DE" smtClean="0"/>
-              <a:t>31.08.2021</a:t>
+              <a:t>01.09.2021</a:t>
             </a:fld>
             <a:endParaRPr lang="de-DE"/>
           </a:p>
@@ -990,7 +990,7 @@
           <a:p>
             <a:fld id="{0767F863-66EA-4676-96BD-1A330B9619CB}" type="datetimeFigureOut">
               <a:rPr lang="de-DE" smtClean="0"/>
-              <a:t>31.08.2021</a:t>
+              <a:t>01.09.2021</a:t>
             </a:fld>
             <a:endParaRPr lang="de-DE"/>
           </a:p>
@@ -1198,7 +1198,7 @@
           <a:p>
             <a:fld id="{0767F863-66EA-4676-96BD-1A330B9619CB}" type="datetimeFigureOut">
               <a:rPr lang="de-DE" smtClean="0"/>
-              <a:t>31.08.2021</a:t>
+              <a:t>01.09.2021</a:t>
             </a:fld>
             <a:endParaRPr lang="de-DE"/>
           </a:p>
@@ -1396,7 +1396,7 @@
           <a:p>
             <a:fld id="{0767F863-66EA-4676-96BD-1A330B9619CB}" type="datetimeFigureOut">
               <a:rPr lang="de-DE" smtClean="0"/>
-              <a:t>31.08.2021</a:t>
+              <a:t>01.09.2021</a:t>
             </a:fld>
             <a:endParaRPr lang="de-DE"/>
           </a:p>
@@ -1671,7 +1671,7 @@
           <a:p>
             <a:fld id="{0767F863-66EA-4676-96BD-1A330B9619CB}" type="datetimeFigureOut">
               <a:rPr lang="de-DE" smtClean="0"/>
-              <a:t>31.08.2021</a:t>
+              <a:t>01.09.2021</a:t>
             </a:fld>
             <a:endParaRPr lang="de-DE"/>
           </a:p>
@@ -1936,7 +1936,7 @@
           <a:p>
             <a:fld id="{0767F863-66EA-4676-96BD-1A330B9619CB}" type="datetimeFigureOut">
               <a:rPr lang="de-DE" smtClean="0"/>
-              <a:t>31.08.2021</a:t>
+              <a:t>01.09.2021</a:t>
             </a:fld>
             <a:endParaRPr lang="de-DE"/>
           </a:p>
@@ -2348,7 +2348,7 @@
           <a:p>
             <a:fld id="{0767F863-66EA-4676-96BD-1A330B9619CB}" type="datetimeFigureOut">
               <a:rPr lang="de-DE" smtClean="0"/>
-              <a:t>31.08.2021</a:t>
+              <a:t>01.09.2021</a:t>
             </a:fld>
             <a:endParaRPr lang="de-DE"/>
           </a:p>
@@ -2489,7 +2489,7 @@
           <a:p>
             <a:fld id="{0767F863-66EA-4676-96BD-1A330B9619CB}" type="datetimeFigureOut">
               <a:rPr lang="de-DE" smtClean="0"/>
-              <a:t>31.08.2021</a:t>
+              <a:t>01.09.2021</a:t>
             </a:fld>
             <a:endParaRPr lang="de-DE"/>
           </a:p>
@@ -2602,7 +2602,7 @@
           <a:p>
             <a:fld id="{0767F863-66EA-4676-96BD-1A330B9619CB}" type="datetimeFigureOut">
               <a:rPr lang="de-DE" smtClean="0"/>
-              <a:t>31.08.2021</a:t>
+              <a:t>01.09.2021</a:t>
             </a:fld>
             <a:endParaRPr lang="de-DE"/>
           </a:p>
@@ -2913,7 +2913,7 @@
           <a:p>
             <a:fld id="{0767F863-66EA-4676-96BD-1A330B9619CB}" type="datetimeFigureOut">
               <a:rPr lang="de-DE" smtClean="0"/>
-              <a:t>31.08.2021</a:t>
+              <a:t>01.09.2021</a:t>
             </a:fld>
             <a:endParaRPr lang="de-DE"/>
           </a:p>
@@ -3201,7 +3201,7 @@
           <a:p>
             <a:fld id="{0767F863-66EA-4676-96BD-1A330B9619CB}" type="datetimeFigureOut">
               <a:rPr lang="de-DE" smtClean="0"/>
-              <a:t>31.08.2021</a:t>
+              <a:t>01.09.2021</a:t>
             </a:fld>
             <a:endParaRPr lang="de-DE"/>
           </a:p>
@@ -3442,7 +3442,7 @@
           <a:p>
             <a:fld id="{0767F863-66EA-4676-96BD-1A330B9619CB}" type="datetimeFigureOut">
               <a:rPr lang="de-DE" smtClean="0"/>
-              <a:t>31.08.2021</a:t>
+              <a:t>01.09.2021</a:t>
             </a:fld>
             <a:endParaRPr lang="de-DE"/>
           </a:p>
@@ -4608,10 +4608,10 @@
       </p:grpSpPr>
       <p:grpSp>
         <p:nvGrpSpPr>
-          <p:cNvPr id="139" name="Gruppieren 138">
-            <a:extLst>
-              <a:ext uri="{FF2B5EF4-FFF2-40B4-BE49-F238E27FC236}">
-                <a16:creationId xmlns:a16="http://schemas.microsoft.com/office/drawing/2014/main" id="{38659083-958C-4FFF-A994-431F67643A5C}"/>
+          <p:cNvPr id="15" name="Gruppieren 14">
+            <a:extLst>
+              <a:ext uri="{FF2B5EF4-FFF2-40B4-BE49-F238E27FC236}">
+                <a16:creationId xmlns:a16="http://schemas.microsoft.com/office/drawing/2014/main" id="{5E532305-6819-468B-8EF3-9DEB14F51525}"/>
               </a:ext>
             </a:extLst>
           </p:cNvPr>
@@ -4620,10 +4620,10 @@
         </p:nvGrpSpPr>
         <p:grpSpPr>
           <a:xfrm>
-            <a:off x="4621530" y="63501"/>
-            <a:ext cx="2225251" cy="6724867"/>
-            <a:chOff x="4621530" y="63501"/>
-            <a:chExt cx="2225251" cy="6724867"/>
+            <a:off x="4571977" y="63501"/>
+            <a:ext cx="2260623" cy="7777209"/>
+            <a:chOff x="4571977" y="63501"/>
+            <a:chExt cx="2260623" cy="7777209"/>
           </a:xfrm>
         </p:grpSpPr>
         <p:sp>
@@ -4688,7 +4688,7 @@
           </p:nvSpPr>
           <p:spPr>
             <a:xfrm>
-              <a:off x="4899449" y="6161835"/>
+              <a:off x="4885251" y="7214177"/>
               <a:ext cx="1947332" cy="626533"/>
             </a:xfrm>
             <a:prstGeom prst="rect">
@@ -4764,7 +4764,7 @@
               <a:pPr algn="ctr"/>
               <a:r>
                 <a:rPr lang="de-DE" sz="1801" dirty="0" err="1"/>
-                <a:t>EnableDialogUI</a:t>
+                <a:t>EnableDialogueUI</a:t>
               </a:r>
               <a:endParaRPr lang="de-DE" sz="1801" dirty="0"/>
             </a:p>
@@ -4859,10 +4859,10 @@
             <a:p>
               <a:pPr algn="ctr"/>
               <a:r>
-                <a:rPr lang="de-DE" sz="1600" dirty="0" err="1"/>
-                <a:t>ShowDialogPartText</a:t>
+                <a:rPr lang="de-DE" sz="1400" dirty="0" err="1"/>
+                <a:t>ShowDialoguePartText</a:t>
               </a:r>
-              <a:endParaRPr lang="de-DE" sz="1801" dirty="0"/>
+              <a:endParaRPr lang="de-DE" dirty="0"/>
             </a:p>
           </p:txBody>
         </p:sp>
@@ -4880,7 +4880,7 @@
           </p:nvSpPr>
           <p:spPr>
             <a:xfrm>
-              <a:off x="4885266" y="3045452"/>
+              <a:off x="4885251" y="4097794"/>
               <a:ext cx="1947332" cy="313268"/>
             </a:xfrm>
             <a:prstGeom prst="rect">
@@ -4928,7 +4928,7 @@
           </p:nvSpPr>
           <p:spPr>
             <a:xfrm>
-              <a:off x="4885255" y="3716754"/>
+              <a:off x="4871057" y="4769096"/>
               <a:ext cx="1947332" cy="313268"/>
             </a:xfrm>
             <a:prstGeom prst="rect">
@@ -4976,7 +4976,7 @@
           </p:nvSpPr>
           <p:spPr>
             <a:xfrm>
-              <a:off x="4885253" y="4521904"/>
+              <a:off x="4871055" y="5574246"/>
               <a:ext cx="1947332" cy="626533"/>
             </a:xfrm>
             <a:prstGeom prst="rect">
@@ -5021,14 +5021,12 @@
             </p:cNvPr>
             <p:cNvCxnSpPr>
               <a:cxnSpLocks/>
-              <a:stCxn id="2" idx="2"/>
-              <a:endCxn id="6" idx="0"/>
             </p:cNvCxnSpPr>
             <p:nvPr/>
           </p:nvCxnSpPr>
           <p:spPr>
             <a:xfrm rot="5400000">
-              <a:off x="5726390" y="822562"/>
+              <a:off x="5729825" y="830733"/>
               <a:ext cx="265072" cy="17"/>
             </a:xfrm>
             <a:prstGeom prst="bentConnector3">
@@ -5064,14 +5062,12 @@
             </p:cNvPr>
             <p:cNvCxnSpPr>
               <a:cxnSpLocks/>
-              <a:stCxn id="6" idx="2"/>
-              <a:endCxn id="8" idx="0"/>
             </p:cNvCxnSpPr>
             <p:nvPr/>
           </p:nvCxnSpPr>
           <p:spPr>
             <a:xfrm rot="16200000" flipH="1">
-              <a:off x="5646446" y="1480845"/>
+              <a:off x="5649881" y="1489016"/>
               <a:ext cx="424958" cy="16"/>
             </a:xfrm>
             <a:prstGeom prst="bentConnector3">
@@ -5109,55 +5105,12 @@
             </p:cNvPr>
             <p:cNvCxnSpPr>
               <a:cxnSpLocks/>
-              <a:stCxn id="8" idx="2"/>
-              <a:endCxn id="9" idx="0"/>
             </p:cNvCxnSpPr>
             <p:nvPr/>
           </p:nvCxnSpPr>
           <p:spPr>
             <a:xfrm rot="5400000">
-              <a:off x="5755641" y="2423155"/>
-              <a:ext cx="206585" cy="2"/>
-            </a:xfrm>
-            <a:prstGeom prst="bentConnector3">
-              <a:avLst/>
-            </a:prstGeom>
-            <a:ln w="38100">
-              <a:tailEnd type="triangle"/>
-            </a:ln>
-          </p:spPr>
-          <p:style>
-            <a:lnRef idx="3">
-              <a:schemeClr val="accent1"/>
-            </a:lnRef>
-            <a:fillRef idx="0">
-              <a:schemeClr val="accent1"/>
-            </a:fillRef>
-            <a:effectRef idx="2">
-              <a:schemeClr val="accent1"/>
-            </a:effectRef>
-            <a:fontRef idx="minor">
-              <a:schemeClr val="tx1"/>
-            </a:fontRef>
-          </p:style>
-        </p:cxnSp>
-        <p:cxnSp>
-          <p:nvCxnSpPr>
-            <p:cNvPr id="55" name="Verbinder: gewinkelt 54">
-              <a:extLst>
-                <a:ext uri="{FF2B5EF4-FFF2-40B4-BE49-F238E27FC236}">
-                  <a16:creationId xmlns:a16="http://schemas.microsoft.com/office/drawing/2014/main" id="{97FDEE72-DA74-4083-902F-4AC2369D1A06}"/>
-                </a:ext>
-              </a:extLst>
-            </p:cNvPr>
-            <p:cNvCxnSpPr>
-              <a:cxnSpLocks/>
-            </p:cNvCxnSpPr>
-            <p:nvPr/>
-          </p:nvCxnSpPr>
-          <p:spPr>
-            <a:xfrm rot="5400000">
-              <a:off x="5755637" y="2942158"/>
+              <a:off x="5759037" y="2430705"/>
               <a:ext cx="206585" cy="2"/>
             </a:xfrm>
             <a:prstGeom prst="bentConnector3">
@@ -5193,13 +5146,12 @@
             </p:cNvPr>
             <p:cNvCxnSpPr>
               <a:cxnSpLocks/>
-              <a:endCxn id="11" idx="0"/>
             </p:cNvCxnSpPr>
             <p:nvPr/>
           </p:nvCxnSpPr>
           <p:spPr>
             <a:xfrm rot="5400000">
-              <a:off x="5681597" y="3539420"/>
+              <a:off x="5670834" y="4599933"/>
               <a:ext cx="354659" cy="9"/>
             </a:xfrm>
             <a:prstGeom prst="bentConnector3">
@@ -5242,7 +5194,7 @@
           </p:nvCxnSpPr>
           <p:spPr>
             <a:xfrm rot="16200000" flipH="1">
-              <a:off x="5611271" y="4275962"/>
+              <a:off x="5600508" y="5336475"/>
               <a:ext cx="495298" cy="2"/>
             </a:xfrm>
             <a:prstGeom prst="bentConnector3">
@@ -5285,7 +5237,7 @@
           </p:nvCxnSpPr>
           <p:spPr>
             <a:xfrm rot="16200000" flipH="1">
-              <a:off x="5611271" y="5395231"/>
+              <a:off x="5600508" y="6455744"/>
               <a:ext cx="495298" cy="2"/>
             </a:xfrm>
             <a:prstGeom prst="bentConnector3">
@@ -5329,7 +5281,7 @@
           </p:nvCxnSpPr>
           <p:spPr>
             <a:xfrm flipH="1" flipV="1">
-              <a:off x="5873115" y="3499281"/>
+              <a:off x="5858917" y="4551623"/>
               <a:ext cx="959472" cy="374107"/>
             </a:xfrm>
             <a:prstGeom prst="bentConnector3">
@@ -5373,13 +5325,13 @@
             <p:nvPr/>
           </p:nvCxnSpPr>
           <p:spPr>
-            <a:xfrm rot="10800000" flipH="1" flipV="1">
-              <a:off x="4885265" y="2683084"/>
-              <a:ext cx="14183" cy="3116432"/>
+            <a:xfrm rot="10800000" flipV="1">
+              <a:off x="4885252" y="2683084"/>
+              <a:ext cx="15" cy="4168774"/>
             </a:xfrm>
             <a:prstGeom prst="bentConnector3">
               <a:avLst>
-                <a:gd name="adj1" fmla="val -1969964"/>
+                <a:gd name="adj1" fmla="val 2147483646"/>
               </a:avLst>
             </a:prstGeom>
             <a:ln w="38100">
@@ -5411,14 +5363,14 @@
               </a:extLst>
             </p:cNvPr>
             <p:cNvCxnSpPr>
-              <a:stCxn id="10" idx="1"/>
+              <a:cxnSpLocks/>
             </p:cNvCxnSpPr>
             <p:nvPr/>
           </p:nvCxnSpPr>
           <p:spPr>
             <a:xfrm flipH="1">
-              <a:off x="4621530" y="3202086"/>
-              <a:ext cx="263736" cy="0"/>
+              <a:off x="4586183" y="4262048"/>
+              <a:ext cx="299068" cy="0"/>
             </a:xfrm>
             <a:prstGeom prst="straightConnector1">
               <a:avLst/>
@@ -5442,49 +5394,6 @@
             </a:fontRef>
           </p:style>
         </p:cxnSp>
-        <p:cxnSp>
-          <p:nvCxnSpPr>
-            <p:cNvPr id="136" name="Verbinder: gewinkelt 135">
-              <a:extLst>
-                <a:ext uri="{FF2B5EF4-FFF2-40B4-BE49-F238E27FC236}">
-                  <a16:creationId xmlns:a16="http://schemas.microsoft.com/office/drawing/2014/main" id="{3D09F42B-A0B1-4F84-AC9C-EAB5D7DB9E31}"/>
-                </a:ext>
-              </a:extLst>
-            </p:cNvPr>
-            <p:cNvCxnSpPr>
-              <a:stCxn id="8" idx="1"/>
-            </p:cNvCxnSpPr>
-            <p:nvPr/>
-          </p:nvCxnSpPr>
-          <p:spPr>
-            <a:xfrm rot="10800000" flipH="1">
-              <a:off x="4885267" y="1436371"/>
-              <a:ext cx="973650" cy="570229"/>
-            </a:xfrm>
-            <a:prstGeom prst="bentConnector3">
-              <a:avLst>
-                <a:gd name="adj1" fmla="val -23479"/>
-              </a:avLst>
-            </a:prstGeom>
-            <a:ln w="38100">
-              <a:tailEnd type="triangle"/>
-            </a:ln>
-          </p:spPr>
-          <p:style>
-            <a:lnRef idx="1">
-              <a:schemeClr val="accent1"/>
-            </a:lnRef>
-            <a:fillRef idx="0">
-              <a:schemeClr val="accent1"/>
-            </a:fillRef>
-            <a:effectRef idx="0">
-              <a:schemeClr val="accent1"/>
-            </a:effectRef>
-            <a:fontRef idx="minor">
-              <a:schemeClr val="tx1"/>
-            </a:fontRef>
-          </p:style>
-        </p:cxnSp>
         <p:sp>
           <p:nvSpPr>
             <p:cNvPr id="25" name="Rechteck 24">
@@ -5499,7 +5408,7 @@
           </p:nvSpPr>
           <p:spPr>
             <a:xfrm>
-              <a:off x="4899449" y="5642882"/>
+              <a:off x="4885251" y="6695224"/>
               <a:ext cx="1947332" cy="313268"/>
             </a:xfrm>
             <a:prstGeom prst="rect">
@@ -5527,7 +5436,7 @@
               <a:pPr algn="ctr"/>
               <a:r>
                 <a:rPr lang="de-DE" sz="1801" dirty="0" err="1"/>
-                <a:t>DisableDialogUI</a:t>
+                <a:t>DisableDialogueUI</a:t>
               </a:r>
               <a:endParaRPr lang="de-DE" sz="1801" dirty="0"/>
             </a:p>
@@ -5549,7 +5458,7 @@
           </p:nvCxnSpPr>
           <p:spPr>
             <a:xfrm rot="5400000">
-              <a:off x="5755623" y="6058991"/>
+              <a:off x="5744860" y="7119504"/>
               <a:ext cx="206585" cy="2"/>
             </a:xfrm>
             <a:prstGeom prst="bentConnector3">
@@ -5592,12 +5501,274 @@
           </p:nvCxnSpPr>
           <p:spPr>
             <a:xfrm flipV="1">
-              <a:off x="6832585" y="2006599"/>
-              <a:ext cx="14" cy="2828572"/>
+              <a:off x="6818387" y="2006599"/>
+              <a:ext cx="14212" cy="3880914"/>
             </a:xfrm>
             <a:prstGeom prst="bentConnector3">
               <a:avLst>
-                <a:gd name="adj1" fmla="val 2147483646"/>
+                <a:gd name="adj1" fmla="val 2637285"/>
+              </a:avLst>
+            </a:prstGeom>
+            <a:ln w="38100">
+              <a:tailEnd type="triangle"/>
+            </a:ln>
+          </p:spPr>
+          <p:style>
+            <a:lnRef idx="3">
+              <a:schemeClr val="accent1"/>
+            </a:lnRef>
+            <a:fillRef idx="0">
+              <a:schemeClr val="accent1"/>
+            </a:fillRef>
+            <a:effectRef idx="2">
+              <a:schemeClr val="accent1"/>
+            </a:effectRef>
+            <a:fontRef idx="minor">
+              <a:schemeClr val="tx1"/>
+            </a:fontRef>
+          </p:style>
+        </p:cxnSp>
+        <p:cxnSp>
+          <p:nvCxnSpPr>
+            <p:cNvPr id="31" name="Verbinder: gewinkelt 30">
+              <a:extLst>
+                <a:ext uri="{FF2B5EF4-FFF2-40B4-BE49-F238E27FC236}">
+                  <a16:creationId xmlns:a16="http://schemas.microsoft.com/office/drawing/2014/main" id="{FF7B5B89-8E31-4172-8963-731D29828049}"/>
+                </a:ext>
+              </a:extLst>
+            </p:cNvPr>
+            <p:cNvCxnSpPr>
+              <a:cxnSpLocks/>
+              <a:stCxn id="9" idx="2"/>
+              <a:endCxn id="28" idx="0"/>
+            </p:cNvCxnSpPr>
+            <p:nvPr/>
+          </p:nvCxnSpPr>
+          <p:spPr>
+            <a:xfrm rot="5400000">
+              <a:off x="5659275" y="3039361"/>
+              <a:ext cx="399300" cy="15"/>
+            </a:xfrm>
+            <a:prstGeom prst="bentConnector3">
+              <a:avLst>
+                <a:gd name="adj1" fmla="val 50000"/>
+              </a:avLst>
+            </a:prstGeom>
+            <a:ln w="38100">
+              <a:tailEnd type="triangle"/>
+            </a:ln>
+          </p:spPr>
+          <p:style>
+            <a:lnRef idx="3">
+              <a:schemeClr val="accent1"/>
+            </a:lnRef>
+            <a:fillRef idx="0">
+              <a:schemeClr val="accent1"/>
+            </a:fillRef>
+            <a:effectRef idx="2">
+              <a:schemeClr val="accent1"/>
+            </a:effectRef>
+            <a:fontRef idx="minor">
+              <a:schemeClr val="tx1"/>
+            </a:fontRef>
+          </p:style>
+        </p:cxnSp>
+        <p:sp>
+          <p:nvSpPr>
+            <p:cNvPr id="28" name="Rechteck 27">
+              <a:extLst>
+                <a:ext uri="{FF2B5EF4-FFF2-40B4-BE49-F238E27FC236}">
+                  <a16:creationId xmlns:a16="http://schemas.microsoft.com/office/drawing/2014/main" id="{47C9070F-6D20-41F3-8221-78ADAAC2E90C}"/>
+                </a:ext>
+              </a:extLst>
+            </p:cNvPr>
+            <p:cNvSpPr/>
+            <p:nvPr/>
+          </p:nvSpPr>
+          <p:spPr>
+            <a:xfrm>
+              <a:off x="4885251" y="3239018"/>
+              <a:ext cx="1947332" cy="626533"/>
+            </a:xfrm>
+            <a:prstGeom prst="rect">
+              <a:avLst/>
+            </a:prstGeom>
+          </p:spPr>
+          <p:style>
+            <a:lnRef idx="0">
+              <a:schemeClr val="accent5"/>
+            </a:lnRef>
+            <a:fillRef idx="3">
+              <a:schemeClr val="accent5"/>
+            </a:fillRef>
+            <a:effectRef idx="3">
+              <a:schemeClr val="accent5"/>
+            </a:effectRef>
+            <a:fontRef idx="minor">
+              <a:schemeClr val="lt1"/>
+            </a:fontRef>
+          </p:style>
+          <p:txBody>
+            <a:bodyPr rtlCol="0" anchor="ctr"/>
+            <a:lstStyle/>
+            <a:p>
+              <a:pPr algn="ctr"/>
+              <a:r>
+                <a:rPr lang="de-DE" sz="1600" dirty="0" err="1"/>
+                <a:t>OnShowCharacter</a:t>
+              </a:r>
+              <a:endParaRPr lang="de-DE" sz="1600" dirty="0"/>
+            </a:p>
+          </p:txBody>
+        </p:sp>
+        <p:cxnSp>
+          <p:nvCxnSpPr>
+            <p:cNvPr id="34" name="Verbinder: gewinkelt 33">
+              <a:extLst>
+                <a:ext uri="{FF2B5EF4-FFF2-40B4-BE49-F238E27FC236}">
+                  <a16:creationId xmlns:a16="http://schemas.microsoft.com/office/drawing/2014/main" id="{CCC52525-FC3B-4AD9-B10F-50A319C007BE}"/>
+                </a:ext>
+              </a:extLst>
+            </p:cNvPr>
+            <p:cNvCxnSpPr/>
+            <p:nvPr/>
+          </p:nvCxnSpPr>
+          <p:spPr>
+            <a:xfrm rot="10800000" flipH="1">
+              <a:off x="4871045" y="3005150"/>
+              <a:ext cx="973650" cy="570229"/>
+            </a:xfrm>
+            <a:prstGeom prst="bentConnector3">
+              <a:avLst>
+                <a:gd name="adj1" fmla="val -19440"/>
+              </a:avLst>
+            </a:prstGeom>
+            <a:ln w="38100">
+              <a:tailEnd type="triangle"/>
+            </a:ln>
+          </p:spPr>
+          <p:style>
+            <a:lnRef idx="1">
+              <a:schemeClr val="accent1"/>
+            </a:lnRef>
+            <a:fillRef idx="0">
+              <a:schemeClr val="accent1"/>
+            </a:fillRef>
+            <a:effectRef idx="0">
+              <a:schemeClr val="accent1"/>
+            </a:effectRef>
+            <a:fontRef idx="minor">
+              <a:schemeClr val="tx1"/>
+            </a:fontRef>
+          </p:style>
+        </p:cxnSp>
+        <p:cxnSp>
+          <p:nvCxnSpPr>
+            <p:cNvPr id="41" name="Verbinder: gewinkelt 40">
+              <a:extLst>
+                <a:ext uri="{FF2B5EF4-FFF2-40B4-BE49-F238E27FC236}">
+                  <a16:creationId xmlns:a16="http://schemas.microsoft.com/office/drawing/2014/main" id="{51392847-6AAC-4FA2-9876-BA2B7BF08DC3}"/>
+                </a:ext>
+              </a:extLst>
+            </p:cNvPr>
+            <p:cNvCxnSpPr>
+              <a:cxnSpLocks/>
+            </p:cNvCxnSpPr>
+            <p:nvPr/>
+          </p:nvCxnSpPr>
+          <p:spPr>
+            <a:xfrm rot="16200000" flipH="1">
+              <a:off x="5731933" y="3981597"/>
+              <a:ext cx="232377" cy="18"/>
+            </a:xfrm>
+            <a:prstGeom prst="bentConnector3">
+              <a:avLst>
+                <a:gd name="adj1" fmla="val 50000"/>
+              </a:avLst>
+            </a:prstGeom>
+            <a:ln w="38100">
+              <a:tailEnd type="triangle"/>
+            </a:ln>
+          </p:spPr>
+          <p:style>
+            <a:lnRef idx="3">
+              <a:schemeClr val="accent1"/>
+            </a:lnRef>
+            <a:fillRef idx="0">
+              <a:schemeClr val="accent1"/>
+            </a:fillRef>
+            <a:effectRef idx="2">
+              <a:schemeClr val="accent1"/>
+            </a:effectRef>
+            <a:fontRef idx="minor">
+              <a:schemeClr val="tx1"/>
+            </a:fontRef>
+          </p:style>
+        </p:cxnSp>
+        <p:cxnSp>
+          <p:nvCxnSpPr>
+            <p:cNvPr id="29" name="Gerade Verbindung mit Pfeil 28">
+              <a:extLst>
+                <a:ext uri="{FF2B5EF4-FFF2-40B4-BE49-F238E27FC236}">
+                  <a16:creationId xmlns:a16="http://schemas.microsoft.com/office/drawing/2014/main" id="{12E45E51-4FA7-4A6A-A370-852A2656315A}"/>
+                </a:ext>
+              </a:extLst>
+            </p:cNvPr>
+            <p:cNvCxnSpPr>
+              <a:cxnSpLocks/>
+            </p:cNvCxnSpPr>
+            <p:nvPr/>
+          </p:nvCxnSpPr>
+          <p:spPr>
+            <a:xfrm>
+              <a:off x="4571977" y="4925730"/>
+              <a:ext cx="299068" cy="0"/>
+            </a:xfrm>
+            <a:prstGeom prst="straightConnector1">
+              <a:avLst/>
+            </a:prstGeom>
+            <a:ln w="38100">
+              <a:tailEnd type="triangle"/>
+            </a:ln>
+          </p:spPr>
+          <p:style>
+            <a:lnRef idx="3">
+              <a:schemeClr val="accent1"/>
+            </a:lnRef>
+            <a:fillRef idx="0">
+              <a:schemeClr val="accent1"/>
+            </a:fillRef>
+            <a:effectRef idx="2">
+              <a:schemeClr val="accent1"/>
+            </a:effectRef>
+            <a:fontRef idx="minor">
+              <a:schemeClr val="tx1"/>
+            </a:fontRef>
+          </p:style>
+        </p:cxnSp>
+        <p:cxnSp>
+          <p:nvCxnSpPr>
+            <p:cNvPr id="49" name="Verbinder: gewinkelt 48">
+              <a:extLst>
+                <a:ext uri="{FF2B5EF4-FFF2-40B4-BE49-F238E27FC236}">
+                  <a16:creationId xmlns:a16="http://schemas.microsoft.com/office/drawing/2014/main" id="{6D8E7027-C984-43F6-A097-0CFAF1924A2C}"/>
+                </a:ext>
+              </a:extLst>
+            </p:cNvPr>
+            <p:cNvCxnSpPr>
+              <a:stCxn id="9" idx="3"/>
+              <a:endCxn id="10" idx="3"/>
+            </p:cNvCxnSpPr>
+            <p:nvPr/>
+          </p:nvCxnSpPr>
+          <p:spPr>
+            <a:xfrm flipH="1">
+              <a:off x="6832583" y="2683084"/>
+              <a:ext cx="15" cy="1571344"/>
+            </a:xfrm>
+            <a:prstGeom prst="bentConnector3">
+              <a:avLst>
+                <a:gd name="adj1" fmla="val -1524000000"/>
               </a:avLst>
             </a:prstGeom>
             <a:ln w="38100">
